--- a/assets/images/Experitments_Procedures_General_StimulationSequence.pptx
+++ b/assets/images/Experitments_Procedures_General_StimulationSequence.pptx
@@ -402,7 +402,7 @@
           <a:p>
             <a:fld id="{43466010-90F5-41E6-AAE8-7E580DBF8C7C}" type="datetimeFigureOut">
               <a:rPr lang="en-DK" smtClean="0"/>
-              <a:t>30/03/2026</a:t>
+              <a:t>24/04/2026</a:t>
             </a:fld>
             <a:endParaRPr lang="en-DK"/>
           </a:p>
@@ -889,7 +889,7 @@
           <a:p>
             <a:fld id="{F1465E3F-0B9F-47C9-9E08-5C827E095B3E}" type="datetimeFigureOut">
               <a:rPr lang="en-DK" smtClean="0"/>
-              <a:t>30/03/2026</a:t>
+              <a:t>24/04/2026</a:t>
             </a:fld>
             <a:endParaRPr lang="en-DK"/>
           </a:p>
@@ -1059,7 +1059,7 @@
           <a:p>
             <a:fld id="{F1465E3F-0B9F-47C9-9E08-5C827E095B3E}" type="datetimeFigureOut">
               <a:rPr lang="en-DK" smtClean="0"/>
-              <a:t>30/03/2026</a:t>
+              <a:t>24/04/2026</a:t>
             </a:fld>
             <a:endParaRPr lang="en-DK"/>
           </a:p>
@@ -1239,7 +1239,7 @@
           <a:p>
             <a:fld id="{F1465E3F-0B9F-47C9-9E08-5C827E095B3E}" type="datetimeFigureOut">
               <a:rPr lang="en-DK" smtClean="0"/>
-              <a:t>30/03/2026</a:t>
+              <a:t>24/04/2026</a:t>
             </a:fld>
             <a:endParaRPr lang="en-DK"/>
           </a:p>
@@ -1409,7 +1409,7 @@
           <a:p>
             <a:fld id="{F1465E3F-0B9F-47C9-9E08-5C827E095B3E}" type="datetimeFigureOut">
               <a:rPr lang="en-DK" smtClean="0"/>
-              <a:t>30/03/2026</a:t>
+              <a:t>24/04/2026</a:t>
             </a:fld>
             <a:endParaRPr lang="en-DK"/>
           </a:p>
@@ -1655,7 +1655,7 @@
           <a:p>
             <a:fld id="{F1465E3F-0B9F-47C9-9E08-5C827E095B3E}" type="datetimeFigureOut">
               <a:rPr lang="en-DK" smtClean="0"/>
-              <a:t>30/03/2026</a:t>
+              <a:t>24/04/2026</a:t>
             </a:fld>
             <a:endParaRPr lang="en-DK"/>
           </a:p>
@@ -1887,7 +1887,7 @@
           <a:p>
             <a:fld id="{F1465E3F-0B9F-47C9-9E08-5C827E095B3E}" type="datetimeFigureOut">
               <a:rPr lang="en-DK" smtClean="0"/>
-              <a:t>30/03/2026</a:t>
+              <a:t>24/04/2026</a:t>
             </a:fld>
             <a:endParaRPr lang="en-DK"/>
           </a:p>
@@ -2254,7 +2254,7 @@
           <a:p>
             <a:fld id="{F1465E3F-0B9F-47C9-9E08-5C827E095B3E}" type="datetimeFigureOut">
               <a:rPr lang="en-DK" smtClean="0"/>
-              <a:t>30/03/2026</a:t>
+              <a:t>24/04/2026</a:t>
             </a:fld>
             <a:endParaRPr lang="en-DK"/>
           </a:p>
@@ -2372,7 +2372,7 @@
           <a:p>
             <a:fld id="{F1465E3F-0B9F-47C9-9E08-5C827E095B3E}" type="datetimeFigureOut">
               <a:rPr lang="en-DK" smtClean="0"/>
-              <a:t>30/03/2026</a:t>
+              <a:t>24/04/2026</a:t>
             </a:fld>
             <a:endParaRPr lang="en-DK"/>
           </a:p>
@@ -2467,7 +2467,7 @@
           <a:p>
             <a:fld id="{F1465E3F-0B9F-47C9-9E08-5C827E095B3E}" type="datetimeFigureOut">
               <a:rPr lang="en-DK" smtClean="0"/>
-              <a:t>30/03/2026</a:t>
+              <a:t>24/04/2026</a:t>
             </a:fld>
             <a:endParaRPr lang="en-DK"/>
           </a:p>
@@ -2744,7 +2744,7 @@
           <a:p>
             <a:fld id="{F1465E3F-0B9F-47C9-9E08-5C827E095B3E}" type="datetimeFigureOut">
               <a:rPr lang="en-DK" smtClean="0"/>
-              <a:t>30/03/2026</a:t>
+              <a:t>24/04/2026</a:t>
             </a:fld>
             <a:endParaRPr lang="en-DK"/>
           </a:p>
@@ -3001,7 +3001,7 @@
           <a:p>
             <a:fld id="{F1465E3F-0B9F-47C9-9E08-5C827E095B3E}" type="datetimeFigureOut">
               <a:rPr lang="en-DK" smtClean="0"/>
-              <a:t>30/03/2026</a:t>
+              <a:t>24/04/2026</a:t>
             </a:fld>
             <a:endParaRPr lang="en-DK"/>
           </a:p>
@@ -3214,7 +3214,7 @@
           <a:p>
             <a:fld id="{F1465E3F-0B9F-47C9-9E08-5C827E095B3E}" type="datetimeFigureOut">
               <a:rPr lang="en-DK" smtClean="0"/>
-              <a:t>30/03/2026</a:t>
+              <a:t>24/04/2026</a:t>
             </a:fld>
             <a:endParaRPr lang="en-DK"/>
           </a:p>
@@ -3650,6 +3650,274 @@
           </a:prstGeom>
         </p:spPr>
       </p:pic>
+      <p:sp>
+        <p:nvSpPr>
+          <p:cNvPr id="2" name="Rectangle 1">
+            <a:extLst>
+              <a:ext uri="{FF2B5EF4-FFF2-40B4-BE49-F238E27FC236}">
+                <a16:creationId xmlns:a16="http://schemas.microsoft.com/office/drawing/2014/main" id="{506CC565-E787-DECD-396C-F605E077FE1F}"/>
+              </a:ext>
+            </a:extLst>
+          </p:cNvPr>
+          <p:cNvSpPr/>
+          <p:nvPr/>
+        </p:nvSpPr>
+        <p:spPr>
+          <a:xfrm>
+            <a:off x="7228029" y="4694401"/>
+            <a:ext cx="7145053" cy="4802890"/>
+          </a:xfrm>
+          <a:prstGeom prst="rect">
+            <a:avLst/>
+          </a:prstGeom>
+          <a:noFill/>
+          <a:ln>
+            <a:solidFill>
+              <a:srgbClr val="FF0000"/>
+            </a:solidFill>
+          </a:ln>
+        </p:spPr>
+        <p:style>
+          <a:lnRef idx="2">
+            <a:schemeClr val="accent1">
+              <a:shade val="15000"/>
+            </a:schemeClr>
+          </a:lnRef>
+          <a:fillRef idx="1">
+            <a:schemeClr val="accent1"/>
+          </a:fillRef>
+          <a:effectRef idx="0">
+            <a:schemeClr val="accent1"/>
+          </a:effectRef>
+          <a:fontRef idx="minor">
+            <a:schemeClr val="lt1"/>
+          </a:fontRef>
+        </p:style>
+        <p:txBody>
+          <a:bodyPr rtlCol="0" anchor="ctr"/>
+          <a:lstStyle/>
+          <a:p>
+            <a:pPr algn="ctr"/>
+            <a:endParaRPr lang="en-DK"/>
+          </a:p>
+        </p:txBody>
+      </p:sp>
+      <p:sp>
+        <p:nvSpPr>
+          <p:cNvPr id="3" name="Rectangle 2">
+            <a:extLst>
+              <a:ext uri="{FF2B5EF4-FFF2-40B4-BE49-F238E27FC236}">
+                <a16:creationId xmlns:a16="http://schemas.microsoft.com/office/drawing/2014/main" id="{D4A6A19D-7A6D-5907-77C9-117C1F27A18B}"/>
+              </a:ext>
+            </a:extLst>
+          </p:cNvPr>
+          <p:cNvSpPr/>
+          <p:nvPr/>
+        </p:nvSpPr>
+        <p:spPr>
+          <a:xfrm>
+            <a:off x="7228029" y="9494324"/>
+            <a:ext cx="7145053" cy="292387"/>
+          </a:xfrm>
+          <a:prstGeom prst="rect">
+            <a:avLst/>
+          </a:prstGeom>
+          <a:noFill/>
+          <a:ln>
+            <a:solidFill>
+              <a:srgbClr val="FF0000"/>
+            </a:solidFill>
+          </a:ln>
+        </p:spPr>
+        <p:style>
+          <a:lnRef idx="2">
+            <a:schemeClr val="accent1">
+              <a:shade val="15000"/>
+            </a:schemeClr>
+          </a:lnRef>
+          <a:fillRef idx="1">
+            <a:schemeClr val="accent1"/>
+          </a:fillRef>
+          <a:effectRef idx="0">
+            <a:schemeClr val="accent1"/>
+          </a:effectRef>
+          <a:fontRef idx="minor">
+            <a:schemeClr val="lt1"/>
+          </a:fontRef>
+        </p:style>
+        <p:txBody>
+          <a:bodyPr rtlCol="0" anchor="ctr"/>
+          <a:lstStyle/>
+          <a:p>
+            <a:pPr algn="ctr"/>
+            <a:endParaRPr lang="en-DK"/>
+          </a:p>
+        </p:txBody>
+      </p:sp>
+      <p:sp>
+        <p:nvSpPr>
+          <p:cNvPr id="4" name="TextBox 3">
+            <a:extLst>
+              <a:ext uri="{FF2B5EF4-FFF2-40B4-BE49-F238E27FC236}">
+                <a16:creationId xmlns:a16="http://schemas.microsoft.com/office/drawing/2014/main" id="{B6992C86-570A-07B2-D599-5332A80B853F}"/>
+              </a:ext>
+            </a:extLst>
+          </p:cNvPr>
+          <p:cNvSpPr txBox="1"/>
+          <p:nvPr/>
+        </p:nvSpPr>
+        <p:spPr>
+          <a:xfrm>
+            <a:off x="15319405" y="6803458"/>
+            <a:ext cx="4063548" cy="584775"/>
+          </a:xfrm>
+          <a:prstGeom prst="rect">
+            <a:avLst/>
+          </a:prstGeom>
+          <a:noFill/>
+        </p:spPr>
+        <p:txBody>
+          <a:bodyPr wrap="none" rtlCol="0">
+            <a:spAutoFit/>
+          </a:bodyPr>
+          <a:lstStyle/>
+          <a:p>
+            <a:r>
+              <a:rPr lang="en-US" sz="3200" dirty="0"/>
+              <a:t>Stimulation sequence</a:t>
+            </a:r>
+            <a:endParaRPr lang="en-DK" sz="3200" dirty="0"/>
+          </a:p>
+        </p:txBody>
+      </p:sp>
+      <p:cxnSp>
+        <p:nvCxnSpPr>
+          <p:cNvPr id="6" name="Straight Arrow Connector 5">
+            <a:extLst>
+              <a:ext uri="{FF2B5EF4-FFF2-40B4-BE49-F238E27FC236}">
+                <a16:creationId xmlns:a16="http://schemas.microsoft.com/office/drawing/2014/main" id="{66BBA023-8D58-7080-351C-1C2F4AF10521}"/>
+              </a:ext>
+            </a:extLst>
+          </p:cNvPr>
+          <p:cNvCxnSpPr>
+            <a:cxnSpLocks/>
+            <a:stCxn id="4" idx="1"/>
+            <a:endCxn id="2" idx="3"/>
+          </p:cNvCxnSpPr>
+          <p:nvPr/>
+        </p:nvCxnSpPr>
+        <p:spPr>
+          <a:xfrm flipH="1">
+            <a:off x="14373082" y="7095846"/>
+            <a:ext cx="946323" cy="0"/>
+          </a:xfrm>
+          <a:prstGeom prst="straightConnector1">
+            <a:avLst/>
+          </a:prstGeom>
+          <a:ln w="38100">
+            <a:solidFill>
+              <a:srgbClr val="FF0000"/>
+            </a:solidFill>
+            <a:tailEnd type="triangle"/>
+          </a:ln>
+        </p:spPr>
+        <p:style>
+          <a:lnRef idx="2">
+            <a:schemeClr val="accent1"/>
+          </a:lnRef>
+          <a:fillRef idx="0">
+            <a:schemeClr val="accent1"/>
+          </a:fillRef>
+          <a:effectRef idx="1">
+            <a:schemeClr val="accent1"/>
+          </a:effectRef>
+          <a:fontRef idx="minor">
+            <a:schemeClr val="tx1"/>
+          </a:fontRef>
+        </p:style>
+      </p:cxnSp>
+      <p:sp>
+        <p:nvSpPr>
+          <p:cNvPr id="9" name="TextBox 8">
+            <a:extLst>
+              <a:ext uri="{FF2B5EF4-FFF2-40B4-BE49-F238E27FC236}">
+                <a16:creationId xmlns:a16="http://schemas.microsoft.com/office/drawing/2014/main" id="{A7026118-FA07-4E73-8C78-91EA87A038AB}"/>
+              </a:ext>
+            </a:extLst>
+          </p:cNvPr>
+          <p:cNvSpPr txBox="1"/>
+          <p:nvPr/>
+        </p:nvSpPr>
+        <p:spPr>
+          <a:xfrm>
+            <a:off x="15319405" y="9348130"/>
+            <a:ext cx="3848682" cy="584775"/>
+          </a:xfrm>
+          <a:prstGeom prst="rect">
+            <a:avLst/>
+          </a:prstGeom>
+          <a:noFill/>
+        </p:spPr>
+        <p:txBody>
+          <a:bodyPr wrap="none" rtlCol="0">
+            <a:spAutoFit/>
+          </a:bodyPr>
+          <a:lstStyle/>
+          <a:p>
+            <a:r>
+              <a:rPr lang="en-US" sz="3200" dirty="0"/>
+              <a:t>Stimulation progress</a:t>
+            </a:r>
+            <a:endParaRPr lang="en-DK" sz="3200" dirty="0"/>
+          </a:p>
+        </p:txBody>
+      </p:sp>
+      <p:cxnSp>
+        <p:nvCxnSpPr>
+          <p:cNvPr id="10" name="Straight Arrow Connector 9">
+            <a:extLst>
+              <a:ext uri="{FF2B5EF4-FFF2-40B4-BE49-F238E27FC236}">
+                <a16:creationId xmlns:a16="http://schemas.microsoft.com/office/drawing/2014/main" id="{F430E7C4-83C8-884D-735D-BEE028885075}"/>
+              </a:ext>
+            </a:extLst>
+          </p:cNvPr>
+          <p:cNvCxnSpPr>
+            <a:cxnSpLocks/>
+            <a:stCxn id="9" idx="1"/>
+            <a:endCxn id="3" idx="3"/>
+          </p:cNvCxnSpPr>
+          <p:nvPr/>
+        </p:nvCxnSpPr>
+        <p:spPr>
+          <a:xfrm flipH="1">
+            <a:off x="14373082" y="9640518"/>
+            <a:ext cx="946323" cy="0"/>
+          </a:xfrm>
+          <a:prstGeom prst="straightConnector1">
+            <a:avLst/>
+          </a:prstGeom>
+          <a:ln w="38100">
+            <a:solidFill>
+              <a:srgbClr val="FF0000"/>
+            </a:solidFill>
+            <a:tailEnd type="triangle"/>
+          </a:ln>
+        </p:spPr>
+        <p:style>
+          <a:lnRef idx="2">
+            <a:schemeClr val="accent1"/>
+          </a:lnRef>
+          <a:fillRef idx="0">
+            <a:schemeClr val="accent1"/>
+          </a:fillRef>
+          <a:effectRef idx="1">
+            <a:schemeClr val="accent1"/>
+          </a:effectRef>
+          <a:fontRef idx="minor">
+            <a:schemeClr val="tx1"/>
+          </a:fontRef>
+        </p:style>
+      </p:cxnSp>
     </p:spTree>
     <p:extLst>
       <p:ext uri="{BB962C8B-B14F-4D97-AF65-F5344CB8AC3E}">
@@ -4294,14 +4562,12 @@
 </file>
 
 <file path=customXml/item1.xml><?xml version="1.0" encoding="utf-8"?>
-<p:properties xmlns:p="http://schemas.microsoft.com/office/2006/metadata/properties" xmlns:xsi="http://www.w3.org/2001/XMLSchema-instance" xmlns:pc="http://schemas.microsoft.com/office/infopath/2007/PartnerControls">
-  <documentManagement>
-    <TaxCatchAll xmlns="6dfb7b4b-871d-4c24-9d42-16b14ecd044c" xsi:nil="true"/>
-    <lcf76f155ced4ddcb4097134ff3c332f xmlns="51c7d8ad-74c8-4833-8478-0d0a5cafce0c">
-      <Terms xmlns="http://schemas.microsoft.com/office/infopath/2007/PartnerControls"/>
-    </lcf76f155ced4ddcb4097134ff3c332f>
-  </documentManagement>
-</p:properties>
+<?mso-contentType ?>
+<FormTemplates xmlns="http://schemas.microsoft.com/sharepoint/v3/contenttype/forms">
+  <Display>DocumentLibraryForm</Display>
+  <Edit>DocumentLibraryForm</Edit>
+  <New>DocumentLibraryForm</New>
+</FormTemplates>
 </file>
 
 <file path=customXml/item2.xml><?xml version="1.0" encoding="utf-8"?>
@@ -4560,21 +4826,20 @@
 </file>
 
 <file path=customXml/item3.xml><?xml version="1.0" encoding="utf-8"?>
-<?mso-contentType ?>
-<FormTemplates xmlns="http://schemas.microsoft.com/sharepoint/v3/contenttype/forms">
-  <Display>DocumentLibraryForm</Display>
-  <Edit>DocumentLibraryForm</Edit>
-  <New>DocumentLibraryForm</New>
-</FormTemplates>
+<p:properties xmlns:p="http://schemas.microsoft.com/office/2006/metadata/properties" xmlns:xsi="http://www.w3.org/2001/XMLSchema-instance" xmlns:pc="http://schemas.microsoft.com/office/infopath/2007/PartnerControls">
+  <documentManagement>
+    <TaxCatchAll xmlns="6dfb7b4b-871d-4c24-9d42-16b14ecd044c" xsi:nil="true"/>
+    <lcf76f155ced4ddcb4097134ff3c332f xmlns="51c7d8ad-74c8-4833-8478-0d0a5cafce0c">
+      <Terms xmlns="http://schemas.microsoft.com/office/infopath/2007/PartnerControls"/>
+    </lcf76f155ced4ddcb4097134ff3c332f>
+  </documentManagement>
+</p:properties>
 </file>
 
 <file path=customXml/itemProps1.xml><?xml version="1.0" encoding="utf-8"?>
-<ds:datastoreItem xmlns:ds="http://schemas.openxmlformats.org/officeDocument/2006/customXml" ds:itemID="{2EF670CE-B0AA-4D52-AFC6-AA4BF7D46EEA}">
+<ds:datastoreItem xmlns:ds="http://schemas.openxmlformats.org/officeDocument/2006/customXml" ds:itemID="{EF875D47-8106-485E-98E0-D60C6A98DA6A}">
   <ds:schemaRefs>
-    <ds:schemaRef ds:uri="http://schemas.microsoft.com/office/2006/metadata/properties"/>
-    <ds:schemaRef ds:uri="http://schemas.microsoft.com/office/infopath/2007/PartnerControls"/>
-    <ds:schemaRef ds:uri="6dfb7b4b-871d-4c24-9d42-16b14ecd044c"/>
-    <ds:schemaRef ds:uri="51c7d8ad-74c8-4833-8478-0d0a5cafce0c"/>
+    <ds:schemaRef ds:uri="http://schemas.microsoft.com/sharepoint/v3/contenttype/forms"/>
   </ds:schemaRefs>
 </ds:datastoreItem>
 </file>
@@ -4599,9 +4864,12 @@
 </file>
 
 <file path=customXml/itemProps3.xml><?xml version="1.0" encoding="utf-8"?>
-<ds:datastoreItem xmlns:ds="http://schemas.openxmlformats.org/officeDocument/2006/customXml" ds:itemID="{EF875D47-8106-485E-98E0-D60C6A98DA6A}">
+<ds:datastoreItem xmlns:ds="http://schemas.openxmlformats.org/officeDocument/2006/customXml" ds:itemID="{2EF670CE-B0AA-4D52-AFC6-AA4BF7D46EEA}">
   <ds:schemaRefs>
-    <ds:schemaRef ds:uri="http://schemas.microsoft.com/sharepoint/v3/contenttype/forms"/>
+    <ds:schemaRef ds:uri="http://schemas.microsoft.com/office/2006/metadata/properties"/>
+    <ds:schemaRef ds:uri="http://schemas.microsoft.com/office/infopath/2007/PartnerControls"/>
+    <ds:schemaRef ds:uri="6dfb7b4b-871d-4c24-9d42-16b14ecd044c"/>
+    <ds:schemaRef ds:uri="51c7d8ad-74c8-4833-8478-0d0a5cafce0c"/>
   </ds:schemaRefs>
 </ds:datastoreItem>
 </file>